--- a/content/2026-2/cea055-estatistica-probabilidade/11-modelos-discretos-iii-poisson/Aula_11_Modelos_Discretos_III_Poisson_SITE.pptx
+++ b/content/2026-2/cea055-estatistica-probabilidade/11-modelos-discretos-iii-poisson/Aula_11_Modelos_Discretos_III_Poisson_SITE.pptx
@@ -5,7 +5,7 @@
     <p:sldMasterId id="2147483648" r:id="rId1"/>
   </p:sldMasterIdLst>
   <p:notesMasterIdLst>
-    <p:notesMasterId r:id="rId19"/>
+    <p:notesMasterId r:id="rId16"/>
   </p:notesMasterIdLst>
   <p:sldIdLst>
     <p:sldId id="900" r:id="rId2"/>
@@ -13,15 +13,15 @@
     <p:sldId id="998" r:id="rId4"/>
     <p:sldId id="989" r:id="rId5"/>
     <p:sldId id="999" r:id="rId6"/>
-    <p:sldId id="1001" r:id="rId8"/>
-    <p:sldId id="1003" r:id="rId9"/>
-    <p:sldId id="992" r:id="rId10"/>
-    <p:sldId id="993" r:id="rId12"/>
-    <p:sldId id="1005" r:id="rId13"/>
-    <p:sldId id="994" r:id="rId14"/>
-    <p:sldId id="1006" r:id="rId15"/>
-    <p:sldId id="901" r:id="rId17"/>
-    <p:sldId id="1008" r:id="rId18"/>
+    <p:sldId id="1001" r:id="rId7"/>
+    <p:sldId id="1003" r:id="rId8"/>
+    <p:sldId id="992" r:id="rId9"/>
+    <p:sldId id="993" r:id="rId10"/>
+    <p:sldId id="1005" r:id="rId11"/>
+    <p:sldId id="994" r:id="rId12"/>
+    <p:sldId id="1006" r:id="rId13"/>
+    <p:sldId id="901" r:id="rId14"/>
+    <p:sldId id="1008" r:id="rId15"/>
   </p:sldIdLst>
   <p:sldSz cx="12192000" cy="6858000"/>
   <p:notesSz cx="6858000" cy="9144000"/>
@@ -236,7 +236,7 @@
           <a:p>
             <a:fld id="{44623A65-BD25-40B6-8815-498297225DF7}" type="datetimeFigureOut">
               <a:rPr lang="pt-BR" smtClean="0"/>
-              <a:t>05/10/2026</a:t>
+              <a:t>22/10/2026</a:t>
             </a:fld>
             <a:endParaRPr lang="pt-BR" dirty="0"/>
           </a:p>
@@ -650,7 +650,7 @@
           <a:p>
             <a:fld id="{5B45E566-B383-4B2D-B951-1136FD38326E}" type="datetimeFigureOut">
               <a:rPr lang="pt-BR" smtClean="0"/>
-              <a:t>05/10/2026</a:t>
+              <a:t>22/10/2026</a:t>
             </a:fld>
             <a:endParaRPr lang="pt-BR" dirty="0"/>
           </a:p>
@@ -848,7 +848,7 @@
           <a:p>
             <a:fld id="{5B45E566-B383-4B2D-B951-1136FD38326E}" type="datetimeFigureOut">
               <a:rPr lang="pt-BR" smtClean="0"/>
-              <a:t>05/10/2026</a:t>
+              <a:t>22/10/2026</a:t>
             </a:fld>
             <a:endParaRPr lang="pt-BR" dirty="0"/>
           </a:p>
@@ -1056,7 +1056,7 @@
           <a:p>
             <a:fld id="{5B45E566-B383-4B2D-B951-1136FD38326E}" type="datetimeFigureOut">
               <a:rPr lang="pt-BR" smtClean="0"/>
-              <a:t>05/10/2026</a:t>
+              <a:t>22/10/2026</a:t>
             </a:fld>
             <a:endParaRPr lang="pt-BR" dirty="0"/>
           </a:p>
@@ -1254,7 +1254,7 @@
           <a:p>
             <a:fld id="{5B45E566-B383-4B2D-B951-1136FD38326E}" type="datetimeFigureOut">
               <a:rPr lang="pt-BR" smtClean="0"/>
-              <a:t>05/10/2026</a:t>
+              <a:t>22/10/2026</a:t>
             </a:fld>
             <a:endParaRPr lang="pt-BR" dirty="0"/>
           </a:p>
@@ -1529,7 +1529,7 @@
           <a:p>
             <a:fld id="{5B45E566-B383-4B2D-B951-1136FD38326E}" type="datetimeFigureOut">
               <a:rPr lang="pt-BR" smtClean="0"/>
-              <a:t>05/10/2026</a:t>
+              <a:t>22/10/2026</a:t>
             </a:fld>
             <a:endParaRPr lang="pt-BR" dirty="0"/>
           </a:p>
@@ -1794,7 +1794,7 @@
           <a:p>
             <a:fld id="{5B45E566-B383-4B2D-B951-1136FD38326E}" type="datetimeFigureOut">
               <a:rPr lang="pt-BR" smtClean="0"/>
-              <a:t>05/10/2026</a:t>
+              <a:t>22/10/2026</a:t>
             </a:fld>
             <a:endParaRPr lang="pt-BR" dirty="0"/>
           </a:p>
@@ -2206,7 +2206,7 @@
           <a:p>
             <a:fld id="{5B45E566-B383-4B2D-B951-1136FD38326E}" type="datetimeFigureOut">
               <a:rPr lang="pt-BR" smtClean="0"/>
-              <a:t>05/10/2026</a:t>
+              <a:t>22/10/2026</a:t>
             </a:fld>
             <a:endParaRPr lang="pt-BR" dirty="0"/>
           </a:p>
@@ -2347,7 +2347,7 @@
           <a:p>
             <a:fld id="{5B45E566-B383-4B2D-B951-1136FD38326E}" type="datetimeFigureOut">
               <a:rPr lang="pt-BR" smtClean="0"/>
-              <a:t>05/10/2026</a:t>
+              <a:t>22/10/2026</a:t>
             </a:fld>
             <a:endParaRPr lang="pt-BR" dirty="0"/>
           </a:p>
@@ -2460,7 +2460,7 @@
           <a:p>
             <a:fld id="{5B45E566-B383-4B2D-B951-1136FD38326E}" type="datetimeFigureOut">
               <a:rPr lang="pt-BR" smtClean="0"/>
-              <a:t>05/10/2026</a:t>
+              <a:t>22/10/2026</a:t>
             </a:fld>
             <a:endParaRPr lang="pt-BR" dirty="0"/>
           </a:p>
@@ -2771,7 +2771,7 @@
           <a:p>
             <a:fld id="{5B45E566-B383-4B2D-B951-1136FD38326E}" type="datetimeFigureOut">
               <a:rPr lang="pt-BR" smtClean="0"/>
-              <a:t>05/10/2026</a:t>
+              <a:t>22/10/2026</a:t>
             </a:fld>
             <a:endParaRPr lang="pt-BR" dirty="0"/>
           </a:p>
@@ -3059,7 +3059,7 @@
           <a:p>
             <a:fld id="{5B45E566-B383-4B2D-B951-1136FD38326E}" type="datetimeFigureOut">
               <a:rPr lang="pt-BR" smtClean="0"/>
-              <a:t>05/10/2026</a:t>
+              <a:t>22/10/2026</a:t>
             </a:fld>
             <a:endParaRPr lang="pt-BR" dirty="0"/>
           </a:p>
@@ -3324,7 +3324,7 @@
           <a:p>
             <a:fld id="{5B45E566-B383-4B2D-B951-1136FD38326E}" type="datetimeFigureOut">
               <a:rPr lang="pt-BR" smtClean="0"/>
-              <a:t>05/10/2026</a:t>
+              <a:t>22/10/2026</a:t>
             </a:fld>
             <a:endParaRPr lang="pt-BR" dirty="0"/>
           </a:p>
@@ -3897,15 +3897,23 @@
             </a:pPr>
             <a:r>
               <a:rPr lang="pt-BR" sz="2400" dirty="0"/>
-              <a:t>Montgomery, Runger. </a:t>
-            </a:r>
-            <a:r>
-              <a:rPr lang="pt-BR" sz="2400" b="1" dirty="0"/>
-              <a:t>Applied Statistics and Probability for Engineers</a:t>
+              <a:t>Montgomery, Runger</a:t>
+            </a:r>
+            <a:r>
+              <a:rPr lang="pt-BR" sz="2400"/>
+              <a:t>. </a:t>
+            </a:r>
+            <a:r>
+              <a:rPr lang="pt-BR" sz="2400" b="1"/>
+              <a:t>Estatística Aplicada e Probabilidade para Engenheiros</a:t>
+            </a:r>
+            <a:r>
+              <a:rPr lang="pt-BR" sz="2400"/>
+              <a:t>, 7ª ed. — </a:t>
             </a:r>
             <a:r>
               <a:rPr lang="pt-BR" sz="2400" dirty="0"/>
-              <a:t>, 7th ed — Cap. 3 (3.8)</a:t>
+              <a:t>Cap. 3 (3.8)</a:t>
             </a:r>
           </a:p>
           <a:p>
@@ -4036,176 +4044,7 @@
 </p:sld>
 </file>
 
-<file path=ppt/slides/slide11.xml><?xml version="1.0" encoding="utf-8"?>
-<p:sld xmlns:a="http://schemas.openxmlformats.org/drawingml/2006/main" xmlns:r="http://schemas.openxmlformats.org/officeDocument/2006/relationships" xmlns:p="http://schemas.openxmlformats.org/presentationml/2006/main">
-  <p:cSld>
-    <p:spTree>
-      <p:nvGrpSpPr>
-        <p:cNvPr id="1" name=""/>
-        <p:cNvGrpSpPr/>
-        <p:nvPr/>
-      </p:nvGrpSpPr>
-      <p:grpSpPr>
-        <a:xfrm>
-          <a:off x="0" y="0"/>
-          <a:ext cx="0" cy="0"/>
-          <a:chOff x="0" y="0"/>
-          <a:chExt cx="0" cy="0"/>
-        </a:xfrm>
-      </p:grpSpPr>
-      <p:sp>
-        <p:nvSpPr>
-          <p:cNvPr id="6" name="CaixaDeTexto 5">
-            <a:extLst>
-              <a:ext uri="{FF2B5EF4-FFF2-40B4-BE49-F238E27FC236}">
-                <a16:creationId xmlns:a16="http://schemas.microsoft.com/office/drawing/2014/main" id="{720B10DA-C761-4DEE-8D86-E170E1C2E981}"/>
-              </a:ext>
-            </a:extLst>
-          </p:cNvPr>
-          <p:cNvSpPr txBox="1"/>
-          <p:nvPr/>
-        </p:nvSpPr>
-        <p:spPr>
-          <a:xfrm>
-            <a:off x="916522" y="716768"/>
-            <a:ext cx="10343661" cy="4467057"/>
-          </a:xfrm>
-          <a:prstGeom prst="rect">
-            <a:avLst/>
-          </a:prstGeom>
-          <a:noFill/>
-        </p:spPr>
-        <p:txBody>
-          <a:bodyPr wrap="square" rtlCol="0">
-            <a:spAutoFit/>
-          </a:bodyPr>
-          <a:lstStyle/>
-          <a:p>
-            <a:pPr>
-              <a:lnSpc>
-                <a:spcPct val="150000"/>
-              </a:lnSpc>
-            </a:pPr>
-            <a:r>
-              <a:rPr lang="pt-BR" sz="2400" b="1" dirty="0"/>
-              <a:t>Exemplo.</a:t>
-            </a:r>
-            <a:r>
-              <a:rPr lang="pt-BR" sz="2400" dirty="0"/>
-              <a:t> Um sistema de pagamentos processou </a:t>
-            </a:r>
-            <a:r>
-              <a:rPr lang="pt-BR" sz="2400" b="1" dirty="0"/>
-              <a:t>10.000 transações</a:t>
-            </a:r>
-            <a:r>
-              <a:rPr lang="pt-BR" sz="2400" dirty="0"/>
-              <a:t>; a probabilidade de uma delas ser uma fraude é de </a:t>
-            </a:r>
-            <a:r>
-              <a:rPr lang="pt-BR" sz="2400" b="1" dirty="0"/>
-              <a:t>0,0003</a:t>
-            </a:r>
-            <a:r>
-              <a:rPr lang="pt-BR" sz="2400" dirty="0"/>
-              <a:t>. Qual a chance de exatamente 5 fraudes no dia?</a:t>
-            </a:r>
-          </a:p>
-          <a:p>
-            <a:pPr>
-              <a:lnSpc>
-                <a:spcPct val="150000"/>
-              </a:lnSpc>
-            </a:pPr>
-            <a:endParaRPr lang="pt-BR" sz="2400" dirty="0"/>
-          </a:p>
-          <a:p>
-            <a:pPr marL="342900" indent="-342900">
-              <a:lnSpc>
-                <a:spcPct val="150000"/>
-              </a:lnSpc>
-              <a:buFont typeface="Arial" panose="020B0604020202020204" pitchFamily="34" charset="0"/>
-              <a:buChar char="•"/>
-            </a:pPr>
-            <a:r>
-              <a:rPr lang="pt-BR" sz="2400" dirty="0"/>
-              <a:t>Como vimos anteriormente, podemos resolver esse exemplo usando a binomial. Monte a resolução.</a:t>
-            </a:r>
-          </a:p>
-          <a:p>
-            <a:pPr marL="342900" indent="-342900">
-              <a:lnSpc>
-                <a:spcPct val="150000"/>
-              </a:lnSpc>
-              <a:buFont typeface="Arial" panose="020B0604020202020204" pitchFamily="34" charset="0"/>
-              <a:buChar char="•"/>
-            </a:pPr>
-            <a:endParaRPr lang="pt-BR" sz="2400" dirty="0"/>
-          </a:p>
-          <a:p>
-            <a:pPr marL="342900" indent="-342900">
-              <a:lnSpc>
-                <a:spcPct val="150000"/>
-              </a:lnSpc>
-              <a:buFont typeface="Arial" panose="020B0604020202020204" pitchFamily="34" charset="0"/>
-              <a:buChar char="•"/>
-            </a:pPr>
-            <a:r>
-              <a:rPr lang="pt-BR" sz="2400" dirty="0"/>
-              <a:t>Qual é o problema dessa solução?</a:t>
-            </a:r>
-          </a:p>
-        </p:txBody>
-      </p:sp>
-      <p:sp>
-        <p:nvSpPr>
-          <p:cNvPr id="3" name="CaixaDeTexto 2">
-            <a:extLst>
-              <a:ext uri="{FF2B5EF4-FFF2-40B4-BE49-F238E27FC236}">
-                <a16:creationId xmlns:a16="http://schemas.microsoft.com/office/drawing/2014/main" id="{19131A04-B5D6-4211-8B49-4615DE5797E9}"/>
-              </a:ext>
-            </a:extLst>
-          </p:cNvPr>
-          <p:cNvSpPr txBox="1"/>
-          <p:nvPr/>
-        </p:nvSpPr>
-        <p:spPr>
-          <a:xfrm>
-            <a:off x="361395" y="6488668"/>
-            <a:ext cx="7620000" cy="300210"/>
-          </a:xfrm>
-          <a:prstGeom prst="rect">
-            <a:avLst/>
-          </a:prstGeom>
-          <a:noFill/>
-        </p:spPr>
-        <p:txBody>
-          <a:bodyPr wrap="none" rtlCol="0">
-            <a:spAutoFit/>
-          </a:bodyPr>
-          <a:lstStyle/>
-          <a:p>
-            <a:r>
-              <a:rPr lang="pt-BR" sz="1351" dirty="0"/>
-              <a:t>CEA055 - Estatística e Probabilidade - Professor: Marcos Goulart Lima</a:t>
-            </a:r>
-          </a:p>
-        </p:txBody>
-      </p:sp>
-    </p:spTree>
-    <p:extLst>
-      <p:ext uri="{BB962C8B-B14F-4D97-AF65-F5344CB8AC3E}">
-        <p14:creationId xmlns:p14="http://schemas.microsoft.com/office/powerpoint/2010/main" val="765298605"/>
-      </p:ext>
-    </p:extLst>
-  </p:cSld>
-  <p:clrMapOvr>
-    <a:masterClrMapping/>
-  </p:clrMapOvr>
-</p:sld>
-</file>
-
-<file path=ppt/slides/slide12.xml><?xml version="1.0" encoding="utf-8"?>
+<file path=ppt/slides/slide10.xml><?xml version="1.0" encoding="utf-8"?>
 <p:sld xmlns:a="http://schemas.openxmlformats.org/drawingml/2006/main" xmlns:r="http://schemas.openxmlformats.org/officeDocument/2006/relationships" xmlns:p="http://schemas.openxmlformats.org/presentationml/2006/main">
   <p:cSld>
     <p:spTree>
@@ -4467,7 +4306,7 @@
 </p:sld>
 </file>
 
-<file path=ppt/slides/slide13.xml><?xml version="1.0" encoding="utf-8"?>
+<file path=ppt/slides/slide11.xml><?xml version="1.0" encoding="utf-8"?>
 <p:sld xmlns:a="http://schemas.openxmlformats.org/drawingml/2006/main" xmlns:r="http://schemas.openxmlformats.org/officeDocument/2006/relationships" xmlns:p="http://schemas.openxmlformats.org/presentationml/2006/main">
   <p:cSld>
     <p:spTree>
@@ -4874,7 +4713,7 @@
 </p:sld>
 </file>
 
-<file path=ppt/slides/slide14.xml><?xml version="1.0" encoding="utf-8"?>
+<file path=ppt/slides/slide12.xml><?xml version="1.0" encoding="utf-8"?>
 <p:sld xmlns:a="http://schemas.openxmlformats.org/drawingml/2006/main" xmlns:r="http://schemas.openxmlformats.org/officeDocument/2006/relationships" xmlns:p="http://schemas.openxmlformats.org/presentationml/2006/main">
   <p:cSld>
     <p:spTree>
@@ -5301,7 +5140,7 @@
 </p:sld>
 </file>
 
-<file path=ppt/slides/slide16.xml><?xml version="1.0" encoding="utf-8"?>
+<file path=ppt/slides/slide13.xml><?xml version="1.0" encoding="utf-8"?>
 <p:sld xmlns:a="http://schemas.openxmlformats.org/drawingml/2006/main" xmlns:r="http://schemas.openxmlformats.org/officeDocument/2006/relationships" xmlns:p="http://schemas.openxmlformats.org/presentationml/2006/main">
   <p:cSld>
     <p:spTree>
@@ -5469,7 +5308,7 @@
 </p:sld>
 </file>
 
-<file path=ppt/slides/slide17.xml><?xml version="1.0" encoding="utf-8"?>
+<file path=ppt/slides/slide14.xml><?xml version="1.0" encoding="utf-8"?>
 <p:sld xmlns:a="http://schemas.openxmlformats.org/drawingml/2006/main" xmlns:r="http://schemas.openxmlformats.org/officeDocument/2006/relationships" xmlns:p="http://schemas.openxmlformats.org/presentationml/2006/main">
   <p:cSld>
     <p:spTree>
@@ -7024,7 +6863,7 @@
 </p:sld>
 </file>
 
-<file path=ppt/slides/slide7.xml><?xml version="1.0" encoding="utf-8"?>
+<file path=ppt/slides/slide6.xml><?xml version="1.0" encoding="utf-8"?>
 <p:sld xmlns:a="http://schemas.openxmlformats.org/drawingml/2006/main" xmlns:r="http://schemas.openxmlformats.org/officeDocument/2006/relationships" xmlns:p="http://schemas.openxmlformats.org/presentationml/2006/main">
   <p:cSld>
     <p:spTree>
@@ -7229,7 +7068,7 @@
 </p:sld>
 </file>
 
-<file path=ppt/slides/slide8.xml><?xml version="1.0" encoding="utf-8"?>
+<file path=ppt/slides/slide7.xml><?xml version="1.0" encoding="utf-8"?>
 <p:sld xmlns:a="http://schemas.openxmlformats.org/drawingml/2006/main" xmlns:r="http://schemas.openxmlformats.org/officeDocument/2006/relationships" xmlns:p="http://schemas.openxmlformats.org/presentationml/2006/main">
   <p:cSld>
     <p:spTree>
@@ -7246,8 +7085,8 @@
           <a:chExt cx="0" cy="0"/>
         </a:xfrm>
       </p:grpSpPr>
-      <mc:AlternateContent xmlns:mc="http://schemas.openxmlformats.org/markup-compatibility/2006">
-        <mc:Choice xmlns:a14="http://schemas.microsoft.com/office/drawing/2010/main" Requires="a14">
+      <mc:AlternateContent xmlns:mc="http://schemas.openxmlformats.org/markup-compatibility/2006" xmlns:a14="http://schemas.microsoft.com/office/drawing/2010/main">
+        <mc:Choice Requires="a14">
           <p:sp>
             <p:nvSpPr>
               <p:cNvPr id="6" name="CaixaDeTexto 5">
@@ -7665,7 +7504,7 @@
             </p:txBody>
           </p:sp>
         </mc:Choice>
-        <mc:Fallback>
+        <mc:Fallback xmlns="">
           <p:sp>
             <p:nvSpPr>
               <p:cNvPr id="6" name="CaixaDeTexto 5">
@@ -7758,7 +7597,7 @@
 </p:sld>
 </file>
 
-<file path=ppt/slides/slide9.xml><?xml version="1.0" encoding="utf-8"?>
+<file path=ppt/slides/slide8.xml><?xml version="1.0" encoding="utf-8"?>
 <p:sld xmlns:a="http://schemas.openxmlformats.org/drawingml/2006/main" xmlns:r="http://schemas.openxmlformats.org/officeDocument/2006/relationships" xmlns:p="http://schemas.openxmlformats.org/presentationml/2006/main">
   <p:cSld>
     <p:spTree>
@@ -8076,6 +7915,175 @@
     <p:extLst>
       <p:ext uri="{BB962C8B-B14F-4D97-AF65-F5344CB8AC3E}">
         <p14:creationId xmlns:p14="http://schemas.microsoft.com/office/powerpoint/2010/main" val="4045778664"/>
+      </p:ext>
+    </p:extLst>
+  </p:cSld>
+  <p:clrMapOvr>
+    <a:masterClrMapping/>
+  </p:clrMapOvr>
+</p:sld>
+</file>
+
+<file path=ppt/slides/slide9.xml><?xml version="1.0" encoding="utf-8"?>
+<p:sld xmlns:a="http://schemas.openxmlformats.org/drawingml/2006/main" xmlns:r="http://schemas.openxmlformats.org/officeDocument/2006/relationships" xmlns:p="http://schemas.openxmlformats.org/presentationml/2006/main">
+  <p:cSld>
+    <p:spTree>
+      <p:nvGrpSpPr>
+        <p:cNvPr id="1" name=""/>
+        <p:cNvGrpSpPr/>
+        <p:nvPr/>
+      </p:nvGrpSpPr>
+      <p:grpSpPr>
+        <a:xfrm>
+          <a:off x="0" y="0"/>
+          <a:ext cx="0" cy="0"/>
+          <a:chOff x="0" y="0"/>
+          <a:chExt cx="0" cy="0"/>
+        </a:xfrm>
+      </p:grpSpPr>
+      <p:sp>
+        <p:nvSpPr>
+          <p:cNvPr id="6" name="CaixaDeTexto 5">
+            <a:extLst>
+              <a:ext uri="{FF2B5EF4-FFF2-40B4-BE49-F238E27FC236}">
+                <a16:creationId xmlns:a16="http://schemas.microsoft.com/office/drawing/2014/main" id="{720B10DA-C761-4DEE-8D86-E170E1C2E981}"/>
+              </a:ext>
+            </a:extLst>
+          </p:cNvPr>
+          <p:cNvSpPr txBox="1"/>
+          <p:nvPr/>
+        </p:nvSpPr>
+        <p:spPr>
+          <a:xfrm>
+            <a:off x="916522" y="716768"/>
+            <a:ext cx="10343661" cy="4467057"/>
+          </a:xfrm>
+          <a:prstGeom prst="rect">
+            <a:avLst/>
+          </a:prstGeom>
+          <a:noFill/>
+        </p:spPr>
+        <p:txBody>
+          <a:bodyPr wrap="square" rtlCol="0">
+            <a:spAutoFit/>
+          </a:bodyPr>
+          <a:lstStyle/>
+          <a:p>
+            <a:pPr>
+              <a:lnSpc>
+                <a:spcPct val="150000"/>
+              </a:lnSpc>
+            </a:pPr>
+            <a:r>
+              <a:rPr lang="pt-BR" sz="2400" b="1" dirty="0"/>
+              <a:t>Exemplo.</a:t>
+            </a:r>
+            <a:r>
+              <a:rPr lang="pt-BR" sz="2400" dirty="0"/>
+              <a:t> Um sistema de pagamentos processou </a:t>
+            </a:r>
+            <a:r>
+              <a:rPr lang="pt-BR" sz="2400" b="1" dirty="0"/>
+              <a:t>10.000 transações</a:t>
+            </a:r>
+            <a:r>
+              <a:rPr lang="pt-BR" sz="2400" dirty="0"/>
+              <a:t>; a probabilidade de uma delas ser uma fraude é de </a:t>
+            </a:r>
+            <a:r>
+              <a:rPr lang="pt-BR" sz="2400" b="1" dirty="0"/>
+              <a:t>0,0003</a:t>
+            </a:r>
+            <a:r>
+              <a:rPr lang="pt-BR" sz="2400" dirty="0"/>
+              <a:t>. Qual a chance de exatamente 5 fraudes no dia?</a:t>
+            </a:r>
+          </a:p>
+          <a:p>
+            <a:pPr>
+              <a:lnSpc>
+                <a:spcPct val="150000"/>
+              </a:lnSpc>
+            </a:pPr>
+            <a:endParaRPr lang="pt-BR" sz="2400" dirty="0"/>
+          </a:p>
+          <a:p>
+            <a:pPr marL="342900" indent="-342900">
+              <a:lnSpc>
+                <a:spcPct val="150000"/>
+              </a:lnSpc>
+              <a:buFont typeface="Arial" panose="020B0604020202020204" pitchFamily="34" charset="0"/>
+              <a:buChar char="•"/>
+            </a:pPr>
+            <a:r>
+              <a:rPr lang="pt-BR" sz="2400" dirty="0"/>
+              <a:t>Como vimos anteriormente, podemos resolver esse exemplo usando a binomial. Monte a resolução.</a:t>
+            </a:r>
+          </a:p>
+          <a:p>
+            <a:pPr marL="342900" indent="-342900">
+              <a:lnSpc>
+                <a:spcPct val="150000"/>
+              </a:lnSpc>
+              <a:buFont typeface="Arial" panose="020B0604020202020204" pitchFamily="34" charset="0"/>
+              <a:buChar char="•"/>
+            </a:pPr>
+            <a:endParaRPr lang="pt-BR" sz="2400" dirty="0"/>
+          </a:p>
+          <a:p>
+            <a:pPr marL="342900" indent="-342900">
+              <a:lnSpc>
+                <a:spcPct val="150000"/>
+              </a:lnSpc>
+              <a:buFont typeface="Arial" panose="020B0604020202020204" pitchFamily="34" charset="0"/>
+              <a:buChar char="•"/>
+            </a:pPr>
+            <a:r>
+              <a:rPr lang="pt-BR" sz="2400" dirty="0"/>
+              <a:t>Qual é o problema dessa solução?</a:t>
+            </a:r>
+          </a:p>
+        </p:txBody>
+      </p:sp>
+      <p:sp>
+        <p:nvSpPr>
+          <p:cNvPr id="3" name="CaixaDeTexto 2">
+            <a:extLst>
+              <a:ext uri="{FF2B5EF4-FFF2-40B4-BE49-F238E27FC236}">
+                <a16:creationId xmlns:a16="http://schemas.microsoft.com/office/drawing/2014/main" id="{19131A04-B5D6-4211-8B49-4615DE5797E9}"/>
+              </a:ext>
+            </a:extLst>
+          </p:cNvPr>
+          <p:cNvSpPr txBox="1"/>
+          <p:nvPr/>
+        </p:nvSpPr>
+        <p:spPr>
+          <a:xfrm>
+            <a:off x="361395" y="6488668"/>
+            <a:ext cx="7620000" cy="300210"/>
+          </a:xfrm>
+          <a:prstGeom prst="rect">
+            <a:avLst/>
+          </a:prstGeom>
+          <a:noFill/>
+        </p:spPr>
+        <p:txBody>
+          <a:bodyPr wrap="none" rtlCol="0">
+            <a:spAutoFit/>
+          </a:bodyPr>
+          <a:lstStyle/>
+          <a:p>
+            <a:r>
+              <a:rPr lang="pt-BR" sz="1351" dirty="0"/>
+              <a:t>CEA055 - Estatística e Probabilidade - Professor: Marcos Goulart Lima</a:t>
+            </a:r>
+          </a:p>
+        </p:txBody>
+      </p:sp>
+    </p:spTree>
+    <p:extLst>
+      <p:ext uri="{BB962C8B-B14F-4D97-AF65-F5344CB8AC3E}">
+        <p14:creationId xmlns:p14="http://schemas.microsoft.com/office/powerpoint/2010/main" val="765298605"/>
       </p:ext>
     </p:extLst>
   </p:cSld>
